--- a/manuscripts/P01_pancreatic_cancer_CRT_immunity/materials/第二評価者_作業依頼_ドラフト.pptx
+++ b/manuscripts/P01_pancreatic_cancer_CRT_immunity/materials/第二評価者_作業依頼_ドラフト.pptx
@@ -9170,7 +9170,7 @@
                           <a:latin typeface="Yu Gothic"/>
                           <a:ea typeface="Yu Gothic"/>
                         </a:rPr>
-                        <a:t>0%</a:t>
+                        <a:t>1%未満</a:t>
                       </a:r>
                     </a:p>
                   </a:txBody>
